--- a/docs/ST-DBSCAN.pptx
+++ b/docs/ST-DBSCAN.pptx
@@ -6,7 +6,8 @@
   </p:sldMasterIdLst>
   <p:sldIdLst>
     <p:sldId id="256" r:id="rId2"/>
-    <p:sldId id="257" r:id="rId3"/>
+    <p:sldId id="258" r:id="rId3"/>
+    <p:sldId id="257" r:id="rId4"/>
   </p:sldIdLst>
   <p:sldSz cx="12192000" cy="6858000"/>
   <p:notesSz cx="6858000" cy="9144000"/>
@@ -105,6 +106,11 @@
       </a:defRPr>
     </a:lvl9pPr>
   </p:defaultTextStyle>
+  <p:extLst>
+    <p:ext uri="{EFAFB233-063F-42B5-8137-9DF3F51BA10A}">
+      <p15:sldGuideLst xmlns:p15="http://schemas.microsoft.com/office/powerpoint/2012/main"/>
+    </p:ext>
+  </p:extLst>
 </p:presentation>
 </file>
 
@@ -255,7 +261,7 @@
           <a:p>
             <a:fld id="{8872C3C7-8DF1-1745-8141-71448EB4937F}" type="datetimeFigureOut">
               <a:rPr lang="en-US" smtClean="0"/>
-              <a:t>7/22/26</a:t>
+              <a:t>7/24/26</a:t>
             </a:fld>
             <a:endParaRPr lang="en-US"/>
           </a:p>
@@ -453,7 +459,7 @@
           <a:p>
             <a:fld id="{8872C3C7-8DF1-1745-8141-71448EB4937F}" type="datetimeFigureOut">
               <a:rPr lang="en-US" smtClean="0"/>
-              <a:t>7/22/26</a:t>
+              <a:t>7/24/26</a:t>
             </a:fld>
             <a:endParaRPr lang="en-US"/>
           </a:p>
@@ -661,7 +667,7 @@
           <a:p>
             <a:fld id="{8872C3C7-8DF1-1745-8141-71448EB4937F}" type="datetimeFigureOut">
               <a:rPr lang="en-US" smtClean="0"/>
-              <a:t>7/22/26</a:t>
+              <a:t>7/24/26</a:t>
             </a:fld>
             <a:endParaRPr lang="en-US"/>
           </a:p>
@@ -859,7 +865,7 @@
           <a:p>
             <a:fld id="{8872C3C7-8DF1-1745-8141-71448EB4937F}" type="datetimeFigureOut">
               <a:rPr lang="en-US" smtClean="0"/>
-              <a:t>7/22/26</a:t>
+              <a:t>7/24/26</a:t>
             </a:fld>
             <a:endParaRPr lang="en-US"/>
           </a:p>
@@ -1134,7 +1140,7 @@
           <a:p>
             <a:fld id="{8872C3C7-8DF1-1745-8141-71448EB4937F}" type="datetimeFigureOut">
               <a:rPr lang="en-US" smtClean="0"/>
-              <a:t>7/22/26</a:t>
+              <a:t>7/24/26</a:t>
             </a:fld>
             <a:endParaRPr lang="en-US"/>
           </a:p>
@@ -1399,7 +1405,7 @@
           <a:p>
             <a:fld id="{8872C3C7-8DF1-1745-8141-71448EB4937F}" type="datetimeFigureOut">
               <a:rPr lang="en-US" smtClean="0"/>
-              <a:t>7/22/26</a:t>
+              <a:t>7/24/26</a:t>
             </a:fld>
             <a:endParaRPr lang="en-US"/>
           </a:p>
@@ -1811,7 +1817,7 @@
           <a:p>
             <a:fld id="{8872C3C7-8DF1-1745-8141-71448EB4937F}" type="datetimeFigureOut">
               <a:rPr lang="en-US" smtClean="0"/>
-              <a:t>7/22/26</a:t>
+              <a:t>7/24/26</a:t>
             </a:fld>
             <a:endParaRPr lang="en-US"/>
           </a:p>
@@ -1952,7 +1958,7 @@
           <a:p>
             <a:fld id="{8872C3C7-8DF1-1745-8141-71448EB4937F}" type="datetimeFigureOut">
               <a:rPr lang="en-US" smtClean="0"/>
-              <a:t>7/22/26</a:t>
+              <a:t>7/24/26</a:t>
             </a:fld>
             <a:endParaRPr lang="en-US"/>
           </a:p>
@@ -2065,7 +2071,7 @@
           <a:p>
             <a:fld id="{8872C3C7-8DF1-1745-8141-71448EB4937F}" type="datetimeFigureOut">
               <a:rPr lang="en-US" smtClean="0"/>
-              <a:t>7/22/26</a:t>
+              <a:t>7/24/26</a:t>
             </a:fld>
             <a:endParaRPr lang="en-US"/>
           </a:p>
@@ -2376,7 +2382,7 @@
           <a:p>
             <a:fld id="{8872C3C7-8DF1-1745-8141-71448EB4937F}" type="datetimeFigureOut">
               <a:rPr lang="en-US" smtClean="0"/>
-              <a:t>7/22/26</a:t>
+              <a:t>7/24/26</a:t>
             </a:fld>
             <a:endParaRPr lang="en-US"/>
           </a:p>
@@ -2664,7 +2670,7 @@
           <a:p>
             <a:fld id="{8872C3C7-8DF1-1745-8141-71448EB4937F}" type="datetimeFigureOut">
               <a:rPr lang="en-US" smtClean="0"/>
-              <a:t>7/22/26</a:t>
+              <a:t>7/24/26</a:t>
             </a:fld>
             <a:endParaRPr lang="en-US"/>
           </a:p>
@@ -2905,7 +2911,7 @@
           <a:p>
             <a:fld id="{8872C3C7-8DF1-1745-8141-71448EB4937F}" type="datetimeFigureOut">
               <a:rPr lang="en-US" smtClean="0"/>
-              <a:t>7/22/26</a:t>
+              <a:t>7/24/26</a:t>
             </a:fld>
             <a:endParaRPr lang="en-US"/>
           </a:p>
@@ -4720,6 +4726,186 @@
 </file>
 
 <file path=ppt/slides/slide2.xml><?xml version="1.0" encoding="utf-8"?>
+<p:sld xmlns:a="http://schemas.openxmlformats.org/drawingml/2006/main" xmlns:r="http://schemas.openxmlformats.org/officeDocument/2006/relationships" xmlns:p="http://schemas.openxmlformats.org/presentationml/2006/main">
+  <p:cSld>
+    <p:spTree>
+      <p:nvGrpSpPr>
+        <p:cNvPr id="1" name=""/>
+        <p:cNvGrpSpPr/>
+        <p:nvPr/>
+      </p:nvGrpSpPr>
+      <p:grpSpPr>
+        <a:xfrm>
+          <a:off x="0" y="0"/>
+          <a:ext cx="0" cy="0"/>
+          <a:chOff x="0" y="0"/>
+          <a:chExt cx="0" cy="0"/>
+        </a:xfrm>
+      </p:grpSpPr>
+      <p:sp>
+        <p:nvSpPr>
+          <p:cNvPr id="4" name="TextBox 3">
+            <a:extLst>
+              <a:ext uri="{FF2B5EF4-FFF2-40B4-BE49-F238E27FC236}">
+                <a16:creationId xmlns:a16="http://schemas.microsoft.com/office/drawing/2014/main" id="{E016C36E-C510-3850-09A6-A4220C93094D}"/>
+              </a:ext>
+            </a:extLst>
+          </p:cNvPr>
+          <p:cNvSpPr txBox="1"/>
+          <p:nvPr/>
+        </p:nvSpPr>
+        <p:spPr>
+          <a:xfrm>
+            <a:off x="669852" y="1443841"/>
+            <a:ext cx="9501384" cy="3970318"/>
+          </a:xfrm>
+          <a:prstGeom prst="rect">
+            <a:avLst/>
+          </a:prstGeom>
+          <a:noFill/>
+        </p:spPr>
+        <p:txBody>
+          <a:bodyPr wrap="none" rtlCol="0">
+            <a:spAutoFit/>
+          </a:bodyPr>
+          <a:lstStyle/>
+          <a:p>
+            <a:r>
+              <a:rPr lang="en-US" b="1" dirty="0"/>
+              <a:t>Compute special distance Matrix </a:t>
+            </a:r>
+            <a:br>
+              <a:rPr lang="en-US" b="1" dirty="0"/>
+            </a:br>
+            <a:r>
+              <a:rPr lang="en-US" dirty="0"/>
+              <a:t>pairwise distance matrix of cases with haversine distance distances </a:t>
+            </a:r>
+            <a:br>
+              <a:rPr lang="en-US" dirty="0"/>
+            </a:br>
+            <a:endParaRPr lang="en-US" dirty="0"/>
+          </a:p>
+          <a:p>
+            <a:r>
+              <a:rPr lang="en-US" b="1" dirty="0"/>
+              <a:t>Compute temporal distance Matrix</a:t>
+            </a:r>
+          </a:p>
+          <a:p>
+            <a:r>
+              <a:rPr lang="en-US"/>
+              <a:t>pairwise distance matrix of time </a:t>
+            </a:r>
+            <a:r>
+              <a:rPr lang="en-US" dirty="0"/>
+              <a:t>intervals between cases</a:t>
+            </a:r>
+          </a:p>
+          <a:p>
+            <a:pPr lvl="0"/>
+            <a:br>
+              <a:rPr lang="en-US" b="1" dirty="0"/>
+            </a:br>
+            <a:r>
+              <a:rPr lang="en-US" b="1" dirty="0"/>
+              <a:t>Convert time penalty in distance penalty:</a:t>
+            </a:r>
+            <a:r>
+              <a:rPr lang="en-US" dirty="0"/>
+              <a:t> </a:t>
+            </a:r>
+            <a:br>
+              <a:rPr lang="en-US" dirty="0"/>
+            </a:br>
+            <a:r>
+              <a:rPr lang="en-US" dirty="0"/>
+              <a:t>If temporal interval &gt; temporal threshold, spatial distance = 99999.0 </a:t>
+            </a:r>
+          </a:p>
+          <a:p>
+            <a:pPr lvl="0"/>
+            <a:br>
+              <a:rPr lang="en-US" b="1" dirty="0"/>
+            </a:br>
+            <a:r>
+              <a:rPr lang="en-US" b="1" dirty="0"/>
+              <a:t>Run Standard DBSCAN</a:t>
+            </a:r>
+            <a:br>
+              <a:rPr lang="en-US" b="1" dirty="0"/>
+            </a:br>
+            <a:r>
+              <a:rPr lang="en-US" dirty="0"/>
+              <a:t>metric='precomputed’ </a:t>
+            </a:r>
+            <a:br>
+              <a:rPr lang="en-US" dirty="0"/>
+            </a:br>
+            <a:br>
+              <a:rPr lang="en-US" dirty="0"/>
+            </a:br>
+            <a:r>
+              <a:rPr lang="en-US" dirty="0"/>
+              <a:t>Points separated by too much time now exceed the spatial threshold and are naturally ignored.</a:t>
+            </a:r>
+          </a:p>
+          <a:p>
+            <a:endParaRPr lang="en-US" dirty="0"/>
+          </a:p>
+        </p:txBody>
+      </p:sp>
+      <p:sp>
+        <p:nvSpPr>
+          <p:cNvPr id="6" name="TextBox 5">
+            <a:extLst>
+              <a:ext uri="{FF2B5EF4-FFF2-40B4-BE49-F238E27FC236}">
+                <a16:creationId xmlns:a16="http://schemas.microsoft.com/office/drawing/2014/main" id="{02633AF6-A9AC-0999-6434-00DF7968601C}"/>
+              </a:ext>
+            </a:extLst>
+          </p:cNvPr>
+          <p:cNvSpPr txBox="1"/>
+          <p:nvPr/>
+        </p:nvSpPr>
+        <p:spPr>
+          <a:xfrm>
+            <a:off x="2371658" y="699518"/>
+            <a:ext cx="6097772" cy="461665"/>
+          </a:xfrm>
+          <a:prstGeom prst="rect">
+            <a:avLst/>
+          </a:prstGeom>
+          <a:noFill/>
+        </p:spPr>
+        <p:txBody>
+          <a:bodyPr wrap="square">
+            <a:spAutoFit/>
+          </a:bodyPr>
+          <a:lstStyle/>
+          <a:p>
+            <a:pPr algn="ctr"/>
+            <a:r>
+              <a:rPr lang="en-US" sz="2400" b="1" dirty="0"/>
+              <a:t>From DBSCAN to ST-DBSCAN</a:t>
+            </a:r>
+            <a:endParaRPr lang="en-US" dirty="0"/>
+          </a:p>
+        </p:txBody>
+      </p:sp>
+    </p:spTree>
+    <p:extLst>
+      <p:ext uri="{BB962C8B-B14F-4D97-AF65-F5344CB8AC3E}">
+        <p14:creationId xmlns:p14="http://schemas.microsoft.com/office/powerpoint/2010/main" val="4000224431"/>
+      </p:ext>
+    </p:extLst>
+  </p:cSld>
+  <p:clrMapOvr>
+    <a:masterClrMapping/>
+  </p:clrMapOvr>
+</p:sld>
+</file>
+
+<file path=ppt/slides/slide3.xml><?xml version="1.0" encoding="utf-8"?>
 <p:sld xmlns:a="http://schemas.openxmlformats.org/drawingml/2006/main" xmlns:r="http://schemas.openxmlformats.org/officeDocument/2006/relationships" xmlns:p="http://schemas.openxmlformats.org/presentationml/2006/main">
   <p:cSld>
     <p:spTree>

--- a/docs/ST-DBSCAN.pptx
+++ b/docs/ST-DBSCAN.pptx
@@ -8,6 +8,7 @@
     <p:sldId id="256" r:id="rId2"/>
     <p:sldId id="258" r:id="rId3"/>
     <p:sldId id="257" r:id="rId4"/>
+    <p:sldId id="259" r:id="rId5"/>
   </p:sldIdLst>
   <p:sldSz cx="12192000" cy="6858000"/>
   <p:notesSz cx="6858000" cy="9144000"/>
@@ -261,7 +262,7 @@
           <a:p>
             <a:fld id="{8872C3C7-8DF1-1745-8141-71448EB4937F}" type="datetimeFigureOut">
               <a:rPr lang="en-US" smtClean="0"/>
-              <a:t>7/24/26</a:t>
+              <a:t>7/27/26</a:t>
             </a:fld>
             <a:endParaRPr lang="en-US"/>
           </a:p>
@@ -459,7 +460,7 @@
           <a:p>
             <a:fld id="{8872C3C7-8DF1-1745-8141-71448EB4937F}" type="datetimeFigureOut">
               <a:rPr lang="en-US" smtClean="0"/>
-              <a:t>7/24/26</a:t>
+              <a:t>7/27/26</a:t>
             </a:fld>
             <a:endParaRPr lang="en-US"/>
           </a:p>
@@ -667,7 +668,7 @@
           <a:p>
             <a:fld id="{8872C3C7-8DF1-1745-8141-71448EB4937F}" type="datetimeFigureOut">
               <a:rPr lang="en-US" smtClean="0"/>
-              <a:t>7/24/26</a:t>
+              <a:t>7/27/26</a:t>
             </a:fld>
             <a:endParaRPr lang="en-US"/>
           </a:p>
@@ -865,7 +866,7 @@
           <a:p>
             <a:fld id="{8872C3C7-8DF1-1745-8141-71448EB4937F}" type="datetimeFigureOut">
               <a:rPr lang="en-US" smtClean="0"/>
-              <a:t>7/24/26</a:t>
+              <a:t>7/27/26</a:t>
             </a:fld>
             <a:endParaRPr lang="en-US"/>
           </a:p>
@@ -1140,7 +1141,7 @@
           <a:p>
             <a:fld id="{8872C3C7-8DF1-1745-8141-71448EB4937F}" type="datetimeFigureOut">
               <a:rPr lang="en-US" smtClean="0"/>
-              <a:t>7/24/26</a:t>
+              <a:t>7/27/26</a:t>
             </a:fld>
             <a:endParaRPr lang="en-US"/>
           </a:p>
@@ -1405,7 +1406,7 @@
           <a:p>
             <a:fld id="{8872C3C7-8DF1-1745-8141-71448EB4937F}" type="datetimeFigureOut">
               <a:rPr lang="en-US" smtClean="0"/>
-              <a:t>7/24/26</a:t>
+              <a:t>7/27/26</a:t>
             </a:fld>
             <a:endParaRPr lang="en-US"/>
           </a:p>
@@ -1817,7 +1818,7 @@
           <a:p>
             <a:fld id="{8872C3C7-8DF1-1745-8141-71448EB4937F}" type="datetimeFigureOut">
               <a:rPr lang="en-US" smtClean="0"/>
-              <a:t>7/24/26</a:t>
+              <a:t>7/27/26</a:t>
             </a:fld>
             <a:endParaRPr lang="en-US"/>
           </a:p>
@@ -1958,7 +1959,7 @@
           <a:p>
             <a:fld id="{8872C3C7-8DF1-1745-8141-71448EB4937F}" type="datetimeFigureOut">
               <a:rPr lang="en-US" smtClean="0"/>
-              <a:t>7/24/26</a:t>
+              <a:t>7/27/26</a:t>
             </a:fld>
             <a:endParaRPr lang="en-US"/>
           </a:p>
@@ -2071,7 +2072,7 @@
           <a:p>
             <a:fld id="{8872C3C7-8DF1-1745-8141-71448EB4937F}" type="datetimeFigureOut">
               <a:rPr lang="en-US" smtClean="0"/>
-              <a:t>7/24/26</a:t>
+              <a:t>7/27/26</a:t>
             </a:fld>
             <a:endParaRPr lang="en-US"/>
           </a:p>
@@ -2382,7 +2383,7 @@
           <a:p>
             <a:fld id="{8872C3C7-8DF1-1745-8141-71448EB4937F}" type="datetimeFigureOut">
               <a:rPr lang="en-US" smtClean="0"/>
-              <a:t>7/24/26</a:t>
+              <a:t>7/27/26</a:t>
             </a:fld>
             <a:endParaRPr lang="en-US"/>
           </a:p>
@@ -2670,7 +2671,7 @@
           <a:p>
             <a:fld id="{8872C3C7-8DF1-1745-8141-71448EB4937F}" type="datetimeFigureOut">
               <a:rPr lang="en-US" smtClean="0"/>
-              <a:t>7/24/26</a:t>
+              <a:t>7/27/26</a:t>
             </a:fld>
             <a:endParaRPr lang="en-US"/>
           </a:p>
@@ -2911,7 +2912,7 @@
           <a:p>
             <a:fld id="{8872C3C7-8DF1-1745-8141-71448EB4937F}" type="datetimeFigureOut">
               <a:rPr lang="en-US" smtClean="0"/>
-              <a:t>7/24/26</a:t>
+              <a:t>7/27/26</a:t>
             </a:fld>
             <a:endParaRPr lang="en-US"/>
           </a:p>
@@ -3475,7 +3476,7 @@
           <p:nvPr>
             <p:extLst>
               <p:ext uri="{D42A27DB-BD31-4B8C-83A1-F6EECF244321}">
-                <p14:modId xmlns:p14="http://schemas.microsoft.com/office/powerpoint/2010/main" val="4162713917"/>
+                <p14:modId xmlns:p14="http://schemas.microsoft.com/office/powerpoint/2010/main" val="2980798973"/>
               </p:ext>
             </p:extLst>
           </p:nvPr>
@@ -3642,9 +3643,7 @@
                       <a:tailEnd type="none" w="med" len="med"/>
                     </a:lnT>
                     <a:lnB w="12700" cap="flat" cmpd="sng" algn="ctr">
-                      <a:solidFill>
-                        <a:schemeClr val="tx1"/>
-                      </a:solidFill>
+                      <a:noFill/>
                       <a:prstDash val="solid"/>
                       <a:round/>
                       <a:headEnd type="none" w="med" len="med"/>
@@ -3794,7 +3793,7 @@
                     <a:bodyPr/>
                     <a:lstStyle/>
                     <a:p>
-                      <a:pPr rtl="0" fontAlgn="b">
+                      <a:pPr algn="r" rtl="0" fontAlgn="b">
                         <a:buNone/>
                       </a:pPr>
                       <a:r>
@@ -3811,9 +3810,7 @@
                   </a:txBody>
                   <a:tcPr marL="28575" marR="28575" marT="19050" marB="19050" anchor="ctr">
                     <a:lnL w="12700" cap="flat" cmpd="sng" algn="ctr">
-                      <a:solidFill>
-                        <a:schemeClr val="tx1"/>
-                      </a:solidFill>
+                      <a:noFill/>
                       <a:prstDash val="solid"/>
                       <a:round/>
                       <a:headEnd type="none" w="med" len="med"/>
@@ -3829,23 +3826,27 @@
                       <a:tailEnd type="none" w="med" len="med"/>
                     </a:lnR>
                     <a:lnT w="12700" cap="flat" cmpd="sng" algn="ctr">
-                      <a:solidFill>
-                        <a:schemeClr val="tx1"/>
-                      </a:solidFill>
+                      <a:noFill/>
                       <a:prstDash val="solid"/>
                       <a:round/>
                       <a:headEnd type="none" w="med" len="med"/>
                       <a:tailEnd type="none" w="med" len="med"/>
                     </a:lnT>
                     <a:lnB w="12700" cap="flat" cmpd="sng" algn="ctr">
-                      <a:solidFill>
-                        <a:schemeClr val="tx1"/>
-                      </a:solidFill>
+                      <a:noFill/>
                       <a:prstDash val="solid"/>
                       <a:round/>
                       <a:headEnd type="none" w="med" len="med"/>
                       <a:tailEnd type="none" w="med" len="med"/>
                     </a:lnB>
+                    <a:lnTlToBr w="12700" cmpd="sng">
+                      <a:noFill/>
+                      <a:prstDash val="solid"/>
+                    </a:lnTlToBr>
+                    <a:lnBlToTr w="12700" cmpd="sng">
+                      <a:noFill/>
+                      <a:prstDash val="solid"/>
+                    </a:lnBlToTr>
                   </a:tcPr>
                 </a:tc>
                 <a:tc>
@@ -3978,7 +3979,7 @@
                     <a:bodyPr/>
                     <a:lstStyle/>
                     <a:p>
-                      <a:pPr rtl="0" fontAlgn="b">
+                      <a:pPr algn="r" rtl="0" fontAlgn="b">
                         <a:buNone/>
                       </a:pPr>
                       <a:r>
@@ -3995,9 +3996,7 @@
                   </a:txBody>
                   <a:tcPr marL="28575" marR="28575" marT="19050" marB="19050" anchor="ctr">
                     <a:lnL w="12700" cap="flat" cmpd="sng" algn="ctr">
-                      <a:solidFill>
-                        <a:schemeClr val="tx1"/>
-                      </a:solidFill>
+                      <a:noFill/>
                       <a:prstDash val="solid"/>
                       <a:round/>
                       <a:headEnd type="none" w="med" len="med"/>
@@ -4013,23 +4012,27 @@
                       <a:tailEnd type="none" w="med" len="med"/>
                     </a:lnR>
                     <a:lnT w="12700" cap="flat" cmpd="sng" algn="ctr">
-                      <a:solidFill>
-                        <a:schemeClr val="tx1"/>
-                      </a:solidFill>
+                      <a:noFill/>
                       <a:prstDash val="solid"/>
                       <a:round/>
                       <a:headEnd type="none" w="med" len="med"/>
                       <a:tailEnd type="none" w="med" len="med"/>
                     </a:lnT>
                     <a:lnB w="12700" cap="flat" cmpd="sng" algn="ctr">
-                      <a:solidFill>
-                        <a:schemeClr val="tx1"/>
-                      </a:solidFill>
+                      <a:noFill/>
                       <a:prstDash val="solid"/>
                       <a:round/>
                       <a:headEnd type="none" w="med" len="med"/>
                       <a:tailEnd type="none" w="med" len="med"/>
                     </a:lnB>
+                    <a:lnTlToBr w="12700" cmpd="sng">
+                      <a:noFill/>
+                      <a:prstDash val="solid"/>
+                    </a:lnTlToBr>
+                    <a:lnBlToTr w="12700" cmpd="sng">
+                      <a:noFill/>
+                      <a:prstDash val="solid"/>
+                    </a:lnBlToTr>
                   </a:tcPr>
                 </a:tc>
                 <a:tc>
@@ -4162,7 +4165,7 @@
                     <a:bodyPr/>
                     <a:lstStyle/>
                     <a:p>
-                      <a:pPr rtl="0" fontAlgn="b">
+                      <a:pPr algn="r" rtl="0" fontAlgn="b">
                         <a:buNone/>
                       </a:pPr>
                       <a:r>
@@ -4179,9 +4182,7 @@
                   </a:txBody>
                   <a:tcPr marL="28575" marR="28575" marT="19050" marB="19050" anchor="ctr">
                     <a:lnL w="12700" cap="flat" cmpd="sng" algn="ctr">
-                      <a:solidFill>
-                        <a:schemeClr val="tx1"/>
-                      </a:solidFill>
+                      <a:noFill/>
                       <a:prstDash val="solid"/>
                       <a:round/>
                       <a:headEnd type="none" w="med" len="med"/>
@@ -4197,23 +4198,27 @@
                       <a:tailEnd type="none" w="med" len="med"/>
                     </a:lnR>
                     <a:lnT w="12700" cap="flat" cmpd="sng" algn="ctr">
-                      <a:solidFill>
-                        <a:schemeClr val="tx1"/>
-                      </a:solidFill>
+                      <a:noFill/>
                       <a:prstDash val="solid"/>
                       <a:round/>
                       <a:headEnd type="none" w="med" len="med"/>
                       <a:tailEnd type="none" w="med" len="med"/>
                     </a:lnT>
                     <a:lnB w="12700" cap="flat" cmpd="sng" algn="ctr">
-                      <a:solidFill>
-                        <a:schemeClr val="tx1"/>
-                      </a:solidFill>
+                      <a:noFill/>
                       <a:prstDash val="solid"/>
                       <a:round/>
                       <a:headEnd type="none" w="med" len="med"/>
                       <a:tailEnd type="none" w="med" len="med"/>
                     </a:lnB>
+                    <a:lnTlToBr w="12700" cmpd="sng">
+                      <a:noFill/>
+                      <a:prstDash val="solid"/>
+                    </a:lnTlToBr>
+                    <a:lnBlToTr w="12700" cmpd="sng">
+                      <a:noFill/>
+                      <a:prstDash val="solid"/>
+                    </a:lnBlToTr>
                   </a:tcPr>
                 </a:tc>
                 <a:tc>
@@ -4346,7 +4351,7 @@
                     <a:bodyPr/>
                     <a:lstStyle/>
                     <a:p>
-                      <a:pPr rtl="0" fontAlgn="b">
+                      <a:pPr algn="r" rtl="0" fontAlgn="b">
                         <a:buNone/>
                       </a:pPr>
                       <a:r>
@@ -4363,9 +4368,7 @@
                   </a:txBody>
                   <a:tcPr marL="28575" marR="28575" marT="19050" marB="19050" anchor="ctr">
                     <a:lnL w="12700" cap="flat" cmpd="sng" algn="ctr">
-                      <a:solidFill>
-                        <a:schemeClr val="tx1"/>
-                      </a:solidFill>
+                      <a:noFill/>
                       <a:prstDash val="solid"/>
                       <a:round/>
                       <a:headEnd type="none" w="med" len="med"/>
@@ -4381,23 +4384,27 @@
                       <a:tailEnd type="none" w="med" len="med"/>
                     </a:lnR>
                     <a:lnT w="12700" cap="flat" cmpd="sng" algn="ctr">
-                      <a:solidFill>
-                        <a:schemeClr val="tx1"/>
-                      </a:solidFill>
+                      <a:noFill/>
                       <a:prstDash val="solid"/>
                       <a:round/>
                       <a:headEnd type="none" w="med" len="med"/>
                       <a:tailEnd type="none" w="med" len="med"/>
                     </a:lnT>
                     <a:lnB w="12700" cap="flat" cmpd="sng" algn="ctr">
-                      <a:solidFill>
-                        <a:schemeClr val="tx1"/>
-                      </a:solidFill>
+                      <a:noFill/>
                       <a:prstDash val="solid"/>
                       <a:round/>
                       <a:headEnd type="none" w="med" len="med"/>
                       <a:tailEnd type="none" w="med" len="med"/>
                     </a:lnB>
+                    <a:lnTlToBr w="12700" cmpd="sng">
+                      <a:noFill/>
+                      <a:prstDash val="solid"/>
+                    </a:lnTlToBr>
+                    <a:lnBlToTr w="12700" cmpd="sng">
+                      <a:noFill/>
+                      <a:prstDash val="solid"/>
+                    </a:lnBlToTr>
                   </a:tcPr>
                 </a:tc>
                 <a:tc>
@@ -4530,14 +4537,14 @@
                     <a:bodyPr/>
                     <a:lstStyle/>
                     <a:p>
-                      <a:pPr rtl="0" fontAlgn="b">
+                      <a:pPr algn="r" rtl="0" fontAlgn="b">
                         <a:buNone/>
                       </a:pPr>
                       <a:r>
                         <a:rPr lang="en-US" sz="1400" dirty="0">
                           <a:effectLst/>
                         </a:rPr>
-                        <a:t>Primary Domain</a:t>
+                        <a:t>Primary  use in literature</a:t>
                       </a:r>
                       <a:endParaRPr lang="en-US" sz="1400" dirty="0">
                         <a:effectLst/>
@@ -4547,9 +4554,7 @@
                   </a:txBody>
                   <a:tcPr marL="28575" marR="28575" marT="19050" marB="19050" anchor="ctr">
                     <a:lnL w="12700" cap="flat" cmpd="sng" algn="ctr">
-                      <a:solidFill>
-                        <a:schemeClr val="tx1"/>
-                      </a:solidFill>
+                      <a:noFill/>
                       <a:prstDash val="solid"/>
                       <a:round/>
                       <a:headEnd type="none" w="med" len="med"/>
@@ -4565,23 +4570,27 @@
                       <a:tailEnd type="none" w="med" len="med"/>
                     </a:lnR>
                     <a:lnT w="12700" cap="flat" cmpd="sng" algn="ctr">
-                      <a:solidFill>
-                        <a:schemeClr val="tx1"/>
-                      </a:solidFill>
+                      <a:noFill/>
                       <a:prstDash val="solid"/>
                       <a:round/>
                       <a:headEnd type="none" w="med" len="med"/>
                       <a:tailEnd type="none" w="med" len="med"/>
                     </a:lnT>
                     <a:lnB w="12700" cap="flat" cmpd="sng" algn="ctr">
-                      <a:solidFill>
-                        <a:schemeClr val="tx1"/>
-                      </a:solidFill>
+                      <a:noFill/>
                       <a:prstDash val="solid"/>
                       <a:round/>
                       <a:headEnd type="none" w="med" len="med"/>
                       <a:tailEnd type="none" w="med" len="med"/>
                     </a:lnB>
+                    <a:lnTlToBr w="12700" cmpd="sng">
+                      <a:noFill/>
+                      <a:prstDash val="solid"/>
+                    </a:lnTlToBr>
+                    <a:lnBlToTr w="12700" cmpd="sng">
+                      <a:noFill/>
+                      <a:prstDash val="solid"/>
+                    </a:lnBlToTr>
                   </a:tcPr>
                 </a:tc>
                 <a:tc>
@@ -4794,12 +4803,8 @@
           </a:p>
           <a:p>
             <a:r>
-              <a:rPr lang="en-US"/>
-              <a:t>pairwise distance matrix of time </a:t>
-            </a:r>
-            <a:r>
               <a:rPr lang="en-US" dirty="0"/>
-              <a:t>intervals between cases</a:t>
+              <a:t>pairwise distance matrix of time intervals between cases</a:t>
             </a:r>
           </a:p>
           <a:p>
@@ -4820,7 +4825,7 @@
             </a:br>
             <a:r>
               <a:rPr lang="en-US" dirty="0"/>
-              <a:t>If temporal interval &gt; temporal threshold, spatial distance = 99999.0 </a:t>
+              <a:t>If temporal interval &gt; temporal threshold, spatial distance (ϵ) = 99999.0 </a:t>
             </a:r>
           </a:p>
           <a:p>
@@ -5055,6 +5060,261 @@
     <p:extLst>
       <p:ext uri="{BB962C8B-B14F-4D97-AF65-F5344CB8AC3E}">
         <p14:creationId xmlns:p14="http://schemas.microsoft.com/office/powerpoint/2010/main" val="3276575327"/>
+      </p:ext>
+    </p:extLst>
+  </p:cSld>
+  <p:clrMapOvr>
+    <a:masterClrMapping/>
+  </p:clrMapOvr>
+</p:sld>
+</file>
+
+<file path=ppt/slides/slide4.xml><?xml version="1.0" encoding="utf-8"?>
+<p:sld xmlns:a="http://schemas.openxmlformats.org/drawingml/2006/main" xmlns:r="http://schemas.openxmlformats.org/officeDocument/2006/relationships" xmlns:p="http://schemas.openxmlformats.org/presentationml/2006/main">
+  <p:cSld>
+    <p:spTree>
+      <p:nvGrpSpPr>
+        <p:cNvPr id="1" name=""/>
+        <p:cNvGrpSpPr/>
+        <p:nvPr/>
+      </p:nvGrpSpPr>
+      <p:grpSpPr>
+        <a:xfrm>
+          <a:off x="0" y="0"/>
+          <a:ext cx="0" cy="0"/>
+          <a:chOff x="0" y="0"/>
+          <a:chExt cx="0" cy="0"/>
+        </a:xfrm>
+      </p:grpSpPr>
+      <p:sp>
+        <p:nvSpPr>
+          <p:cNvPr id="5" name="TextBox 4">
+            <a:extLst>
+              <a:ext uri="{FF2B5EF4-FFF2-40B4-BE49-F238E27FC236}">
+                <a16:creationId xmlns:a16="http://schemas.microsoft.com/office/drawing/2014/main" id="{91320E43-5FD4-9719-D15B-DFC56441A21B}"/>
+              </a:ext>
+            </a:extLst>
+          </p:cNvPr>
+          <p:cNvSpPr txBox="1"/>
+          <p:nvPr/>
+        </p:nvSpPr>
+        <p:spPr>
+          <a:xfrm>
+            <a:off x="1108364" y="1602138"/>
+            <a:ext cx="10644638" cy="3416320"/>
+          </a:xfrm>
+          <a:prstGeom prst="rect">
+            <a:avLst/>
+          </a:prstGeom>
+          <a:noFill/>
+        </p:spPr>
+        <p:txBody>
+          <a:bodyPr wrap="square">
+            <a:spAutoFit/>
+          </a:bodyPr>
+          <a:lstStyle/>
+          <a:p>
+            <a:pPr rtl="0">
+              <a:buNone/>
+            </a:pPr>
+            <a:r>
+              <a:rPr lang="en-US" b="1" dirty="0">
+                <a:latin typeface="Courier New" panose="02070309020205020404" pitchFamily="49" charset="0"/>
+              </a:rPr>
+              <a:t>1_cluster_map.html</a:t>
+            </a:r>
+            <a:endParaRPr lang="en-US" i="1" dirty="0"/>
+          </a:p>
+          <a:p>
+            <a:pPr marL="342900" lvl="0" indent="-342900" rtl="0">
+              <a:buFont typeface="Arial" panose="020B0604020202020204" pitchFamily="34" charset="0"/>
+              <a:buChar char="•"/>
+            </a:pPr>
+            <a:r>
+              <a:rPr lang="en-US" u="sng" dirty="0"/>
+              <a:t>Each dot </a:t>
+            </a:r>
+            <a:r>
+              <a:rPr lang="en-US" dirty="0"/>
+              <a:t>= one case, placed at its ZIP code's location</a:t>
+            </a:r>
+          </a:p>
+          <a:p>
+            <a:pPr marL="342900" lvl="0" indent="-342900">
+              <a:buFont typeface="Arial" panose="020B0604020202020204" pitchFamily="34" charset="0"/>
+              <a:buChar char="•"/>
+            </a:pPr>
+            <a:r>
+              <a:rPr lang="en-US" u="sng" dirty="0"/>
+              <a:t>Shaded polygons </a:t>
+            </a:r>
+            <a:r>
+              <a:rPr lang="en-US" dirty="0"/>
+              <a:t>= convex hull —spatial footprint, not a fixed-radius circle (</a:t>
+            </a:r>
+            <a:r>
+              <a:rPr lang="en-US" dirty="0" err="1"/>
+              <a:t>SatScan</a:t>
+            </a:r>
+            <a:r>
+              <a:rPr lang="en-US" dirty="0"/>
+              <a:t>)</a:t>
+            </a:r>
+          </a:p>
+          <a:p>
+            <a:pPr marL="342900" lvl="0" indent="-342900">
+              <a:buFont typeface="Arial" panose="020B0604020202020204" pitchFamily="34" charset="0"/>
+              <a:buChar char="•"/>
+            </a:pPr>
+            <a:endParaRPr lang="en-US" dirty="0"/>
+          </a:p>
+          <a:p>
+            <a:pPr lvl="0"/>
+            <a:r>
+              <a:rPr lang="en-US" b="1" dirty="0"/>
+              <a:t>File 2 — </a:t>
+            </a:r>
+            <a:r>
+              <a:rPr lang="en-US" b="1" dirty="0">
+                <a:latin typeface="Courier New" panose="02070309020205020404" pitchFamily="49" charset="0"/>
+              </a:rPr>
+              <a:t>2_cluster_3d.html</a:t>
+            </a:r>
+            <a:endParaRPr lang="en-US" dirty="0"/>
+          </a:p>
+          <a:p>
+            <a:pPr marL="342900" lvl="0" indent="-342900">
+              <a:buFont typeface="Arial" panose="020B0604020202020204" pitchFamily="34" charset="0"/>
+              <a:buChar char="•"/>
+            </a:pPr>
+            <a:r>
+              <a:rPr lang="en-US" u="sng" dirty="0"/>
+              <a:t>Each dot</a:t>
+            </a:r>
+            <a:r>
+              <a:rPr lang="en-US" dirty="0"/>
+              <a:t> = one case</a:t>
+            </a:r>
+          </a:p>
+          <a:p>
+            <a:pPr marL="342900" indent="-342900">
+              <a:buFont typeface="Arial" panose="020B0604020202020204" pitchFamily="34" charset="0"/>
+              <a:buChar char="•"/>
+            </a:pPr>
+            <a:r>
+              <a:rPr lang="en-US" dirty="0"/>
+              <a:t>3D: </a:t>
+            </a:r>
+            <a:r>
+              <a:rPr lang="en-US" u="sng" dirty="0"/>
+              <a:t>X/Y </a:t>
+            </a:r>
+            <a:r>
+              <a:rPr lang="en-US" dirty="0"/>
+              <a:t>= longitude/latitude</a:t>
+            </a:r>
+          </a:p>
+          <a:p>
+            <a:pPr marL="342900" lvl="0" indent="-342900" rtl="0">
+              <a:buFont typeface="Arial" panose="020B0604020202020204" pitchFamily="34" charset="0"/>
+              <a:buChar char="•"/>
+            </a:pPr>
+            <a:r>
+              <a:rPr lang="en-US" u="sng" dirty="0"/>
+              <a:t>Z</a:t>
+            </a:r>
+            <a:r>
+              <a:rPr lang="en-US" dirty="0"/>
+              <a:t> = time (days)</a:t>
+            </a:r>
+          </a:p>
+          <a:p>
+            <a:pPr lvl="0" rtl="0"/>
+            <a:endParaRPr lang="en-US" dirty="0"/>
+          </a:p>
+          <a:p>
+            <a:pPr marL="342900" lvl="0" indent="-342900" rtl="0">
+              <a:buFont typeface="Arial" panose="020B0604020202020204" pitchFamily="34" charset="0"/>
+              <a:buChar char="•"/>
+            </a:pPr>
+            <a:r>
+              <a:rPr lang="en-US" dirty="0"/>
+              <a:t>Spatiotemporally close clusters forms blobs or cylinders</a:t>
+            </a:r>
+          </a:p>
+          <a:p>
+            <a:pPr rtl="0">
+              <a:buNone/>
+            </a:pPr>
+            <a:r>
+              <a:rPr lang="en-US" b="1" dirty="0"/>
+              <a:t>File 3 — </a:t>
+            </a:r>
+            <a:r>
+              <a:rPr lang="en-US" b="1" dirty="0">
+                <a:latin typeface="Courier New" panose="02070309020205020404" pitchFamily="49" charset="0"/>
+              </a:rPr>
+              <a:t>3_cluster_timeline.html</a:t>
+            </a:r>
+            <a:endParaRPr lang="en-US" dirty="0"/>
+          </a:p>
+          <a:p>
+            <a:pPr marL="342900" lvl="0" indent="-342900" rtl="0">
+              <a:buFont typeface="Arial" panose="020B0604020202020204" pitchFamily="34" charset="0"/>
+              <a:buChar char="•"/>
+            </a:pPr>
+            <a:r>
+              <a:rPr lang="en-US" u="sng" dirty="0"/>
+              <a:t>Each dot</a:t>
+            </a:r>
+            <a:r>
+              <a:rPr lang="en-US" dirty="0"/>
+              <a:t> = one case</a:t>
+            </a:r>
+          </a:p>
+        </p:txBody>
+      </p:sp>
+      <p:sp>
+        <p:nvSpPr>
+          <p:cNvPr id="6" name="TextBox 5">
+            <a:extLst>
+              <a:ext uri="{FF2B5EF4-FFF2-40B4-BE49-F238E27FC236}">
+                <a16:creationId xmlns:a16="http://schemas.microsoft.com/office/drawing/2014/main" id="{5C02A3F6-7D2B-B623-BC37-C197515CB9F3}"/>
+              </a:ext>
+            </a:extLst>
+          </p:cNvPr>
+          <p:cNvSpPr txBox="1"/>
+          <p:nvPr/>
+        </p:nvSpPr>
+        <p:spPr>
+          <a:xfrm>
+            <a:off x="175491" y="431663"/>
+            <a:ext cx="3168073" cy="461665"/>
+          </a:xfrm>
+          <a:prstGeom prst="rect">
+            <a:avLst/>
+          </a:prstGeom>
+          <a:noFill/>
+        </p:spPr>
+        <p:txBody>
+          <a:bodyPr wrap="square">
+            <a:spAutoFit/>
+          </a:bodyPr>
+          <a:lstStyle/>
+          <a:p>
+            <a:pPr algn="ctr"/>
+            <a:r>
+              <a:rPr lang="en-US" sz="2400" b="1" dirty="0"/>
+              <a:t>ST-DBSCAN plots</a:t>
+            </a:r>
+            <a:endParaRPr lang="en-US" dirty="0"/>
+          </a:p>
+        </p:txBody>
+      </p:sp>
+    </p:spTree>
+    <p:extLst>
+      <p:ext uri="{BB962C8B-B14F-4D97-AF65-F5344CB8AC3E}">
+        <p14:creationId xmlns:p14="http://schemas.microsoft.com/office/powerpoint/2010/main" val="1188023435"/>
       </p:ext>
     </p:extLst>
   </p:cSld>

--- a/docs/ST-DBSCAN.pptx
+++ b/docs/ST-DBSCAN.pptx
@@ -9,6 +9,7 @@
     <p:sldId id="258" r:id="rId3"/>
     <p:sldId id="257" r:id="rId4"/>
     <p:sldId id="259" r:id="rId5"/>
+    <p:sldId id="260" r:id="rId6"/>
   </p:sldIdLst>
   <p:sldSz cx="12192000" cy="6858000"/>
   <p:notesSz cx="6858000" cy="9144000"/>
@@ -3387,8 +3388,8 @@
         </p:nvSpPr>
         <p:spPr>
           <a:xfrm>
-            <a:off x="919286" y="2230651"/>
-            <a:ext cx="10948086" cy="1846659"/>
+            <a:off x="891854" y="1978786"/>
+            <a:ext cx="10948086" cy="2031325"/>
           </a:xfrm>
           <a:prstGeom prst="rect">
             <a:avLst/>
@@ -3439,13 +3440,26 @@
               </a:rPr>
               <a:t>https://doi.org/10.1186/s13034-024-00745-9</a:t>
             </a:r>
+            <a:endParaRPr lang="en-US" sz="1200" dirty="0">
+              <a:effectLst/>
+            </a:endParaRPr>
+          </a:p>
+          <a:p>
             <a:endParaRPr lang="en-US" sz="1200" b="1" dirty="0"/>
           </a:p>
           <a:p>
             <a:pPr lvl="0"/>
             <a:r>
               <a:rPr lang="en-US" dirty="0"/>
-              <a:t>It groups data densely packed data points in space-time</a:t>
+              <a:t>It groups data </a:t>
+            </a:r>
+            <a:r>
+              <a:rPr lang="en-US" b="1" dirty="0"/>
+              <a:t>densely packed</a:t>
+            </a:r>
+            <a:r>
+              <a:rPr lang="en-US" dirty="0"/>
+              <a:t> data points in space-time</a:t>
             </a:r>
           </a:p>
           <a:p>
@@ -5315,6 +5329,142 @@
     <p:extLst>
       <p:ext uri="{BB962C8B-B14F-4D97-AF65-F5344CB8AC3E}">
         <p14:creationId xmlns:p14="http://schemas.microsoft.com/office/powerpoint/2010/main" val="1188023435"/>
+      </p:ext>
+    </p:extLst>
+  </p:cSld>
+  <p:clrMapOvr>
+    <a:masterClrMapping/>
+  </p:clrMapOvr>
+</p:sld>
+</file>
+
+<file path=ppt/slides/slide5.xml><?xml version="1.0" encoding="utf-8"?>
+<p:sld xmlns:a="http://schemas.openxmlformats.org/drawingml/2006/main" xmlns:r="http://schemas.openxmlformats.org/officeDocument/2006/relationships" xmlns:p="http://schemas.openxmlformats.org/presentationml/2006/main">
+  <p:cSld>
+    <p:spTree>
+      <p:nvGrpSpPr>
+        <p:cNvPr id="1" name=""/>
+        <p:cNvGrpSpPr/>
+        <p:nvPr/>
+      </p:nvGrpSpPr>
+      <p:grpSpPr>
+        <a:xfrm>
+          <a:off x="0" y="0"/>
+          <a:ext cx="0" cy="0"/>
+          <a:chOff x="0" y="0"/>
+          <a:chExt cx="0" cy="0"/>
+        </a:xfrm>
+      </p:grpSpPr>
+      <p:sp>
+        <p:nvSpPr>
+          <p:cNvPr id="4" name="TextBox 3">
+            <a:extLst>
+              <a:ext uri="{FF2B5EF4-FFF2-40B4-BE49-F238E27FC236}">
+                <a16:creationId xmlns:a16="http://schemas.microsoft.com/office/drawing/2014/main" id="{3E65F3F9-8D1B-3069-8CAF-0A001773FB60}"/>
+              </a:ext>
+            </a:extLst>
+          </p:cNvPr>
+          <p:cNvSpPr txBox="1"/>
+          <p:nvPr/>
+        </p:nvSpPr>
+        <p:spPr>
+          <a:xfrm>
+            <a:off x="2606565" y="1418897"/>
+            <a:ext cx="9060557" cy="2862322"/>
+          </a:xfrm>
+          <a:prstGeom prst="rect">
+            <a:avLst/>
+          </a:prstGeom>
+          <a:noFill/>
+        </p:spPr>
+        <p:txBody>
+          <a:bodyPr wrap="none" rtlCol="0">
+            <a:spAutoFit/>
+          </a:bodyPr>
+          <a:lstStyle/>
+          <a:p>
+            <a:r>
+              <a:rPr lang="en-US" dirty="0"/>
+              <a:t>Steepest descent – start from </a:t>
+            </a:r>
+            <a:r>
+              <a:rPr lang="en-US" dirty="0" err="1"/>
+              <a:t>highr</a:t>
+            </a:r>
+            <a:r>
+              <a:rPr lang="en-US" dirty="0"/>
+              <a:t> </a:t>
+            </a:r>
+            <a:r>
+              <a:rPr lang="en-US" dirty="0" err="1"/>
+              <a:t>thr</a:t>
+            </a:r>
+            <a:r>
+              <a:rPr lang="en-US" dirty="0"/>
+              <a:t> and get lower. Grid search to see when it collapses </a:t>
+            </a:r>
+          </a:p>
+          <a:p>
+            <a:endParaRPr lang="en-US" dirty="0"/>
+          </a:p>
+          <a:p>
+            <a:r>
+              <a:rPr lang="en-US" dirty="0"/>
+              <a:t>For different </a:t>
+            </a:r>
+            <a:r>
+              <a:rPr lang="en-US" dirty="0" err="1"/>
+              <a:t>thr</a:t>
+            </a:r>
+            <a:r>
+              <a:rPr lang="en-US" dirty="0"/>
+              <a:t> (1% 5% 10% and so on) </a:t>
+            </a:r>
+            <a:r>
+              <a:rPr lang="en-US" dirty="0" err="1"/>
+              <a:t>multile</a:t>
+            </a:r>
+            <a:r>
+              <a:rPr lang="en-US" dirty="0"/>
+              <a:t> comb of space and time same outcome</a:t>
+            </a:r>
+          </a:p>
+          <a:p>
+            <a:endParaRPr lang="en-US" dirty="0"/>
+          </a:p>
+          <a:p>
+            <a:r>
+              <a:rPr lang="en-US" dirty="0"/>
+              <a:t>What is the % of suicide due to contagion</a:t>
+            </a:r>
+          </a:p>
+          <a:p>
+            <a:endParaRPr lang="en-US" dirty="0"/>
+          </a:p>
+          <a:p>
+            <a:endParaRPr lang="en-US" dirty="0"/>
+          </a:p>
+          <a:p>
+            <a:r>
+              <a:rPr lang="en-US" dirty="0"/>
+              <a:t>Proportion of total suicide that actually got clustered</a:t>
+            </a:r>
+          </a:p>
+          <a:p>
+            <a:endParaRPr lang="en-US" dirty="0"/>
+          </a:p>
+          <a:p>
+            <a:r>
+              <a:rPr lang="en-US" dirty="0"/>
+              <a:t>Do age groups.</a:t>
+            </a:r>
+          </a:p>
+        </p:txBody>
+      </p:sp>
+    </p:spTree>
+    <p:extLst>
+      <p:ext uri="{BB962C8B-B14F-4D97-AF65-F5344CB8AC3E}">
+        <p14:creationId xmlns:p14="http://schemas.microsoft.com/office/powerpoint/2010/main" val="2216244110"/>
       </p:ext>
     </p:extLst>
   </p:cSld>
